--- a/04_reports/Forecasting_Approach_01.pptx
+++ b/04_reports/Forecasting_Approach_01.pptx
@@ -108,6 +108,11 @@
       </a:defRPr>
     </a:lvl9pPr>
   </p:defaultTextStyle>
+  <p:extLst>
+    <p:ext uri="{EFAFB233-063F-42B5-8137-9DF3F51BA10A}">
+      <p15:sldGuideLst xmlns:p15="http://schemas.microsoft.com/office/powerpoint/2012/main"/>
+    </p:ext>
+  </p:extLst>
 </p:presentation>
 </file>
 
@@ -193,7 +198,7 @@
           <a:p>
             <a:fld id="{2BF0393C-EE02-9F45-9A2B-7F4AFF6DAEEC}" type="datetimeFigureOut">
               <a:rPr lang="en-NL" smtClean="0"/>
-              <a:t>17/04/2025</a:t>
+              <a:t>25/04/2025</a:t>
             </a:fld>
             <a:endParaRPr lang="en-NL"/>
           </a:p>
@@ -610,7 +615,7 @@
           <a:p>
             <a:fld id="{1E6A08FF-52C1-AC4B-874F-8C509BB53652}" type="datetimeFigureOut">
               <a:rPr lang="en-NL" smtClean="0"/>
-              <a:t>30/03/2025</a:t>
+              <a:t>25/04/2025</a:t>
             </a:fld>
             <a:endParaRPr lang="en-NL"/>
           </a:p>
@@ -810,7 +815,7 @@
           <a:p>
             <a:fld id="{1E6A08FF-52C1-AC4B-874F-8C509BB53652}" type="datetimeFigureOut">
               <a:rPr lang="en-NL" smtClean="0"/>
-              <a:t>30/03/2025</a:t>
+              <a:t>25/04/2025</a:t>
             </a:fld>
             <a:endParaRPr lang="en-NL"/>
           </a:p>
@@ -1020,7 +1025,7 @@
           <a:p>
             <a:fld id="{1E6A08FF-52C1-AC4B-874F-8C509BB53652}" type="datetimeFigureOut">
               <a:rPr lang="en-NL" smtClean="0"/>
-              <a:t>30/03/2025</a:t>
+              <a:t>25/04/2025</a:t>
             </a:fld>
             <a:endParaRPr lang="en-NL"/>
           </a:p>
@@ -1220,7 +1225,7 @@
           <a:p>
             <a:fld id="{1E6A08FF-52C1-AC4B-874F-8C509BB53652}" type="datetimeFigureOut">
               <a:rPr lang="en-NL" smtClean="0"/>
-              <a:t>30/03/2025</a:t>
+              <a:t>25/04/2025</a:t>
             </a:fld>
             <a:endParaRPr lang="en-NL"/>
           </a:p>
@@ -1496,7 +1501,7 @@
           <a:p>
             <a:fld id="{1E6A08FF-52C1-AC4B-874F-8C509BB53652}" type="datetimeFigureOut">
               <a:rPr lang="en-NL" smtClean="0"/>
-              <a:t>30/03/2025</a:t>
+              <a:t>25/04/2025</a:t>
             </a:fld>
             <a:endParaRPr lang="en-NL"/>
           </a:p>
@@ -1764,7 +1769,7 @@
           <a:p>
             <a:fld id="{1E6A08FF-52C1-AC4B-874F-8C509BB53652}" type="datetimeFigureOut">
               <a:rPr lang="en-NL" smtClean="0"/>
-              <a:t>30/03/2025</a:t>
+              <a:t>25/04/2025</a:t>
             </a:fld>
             <a:endParaRPr lang="en-NL"/>
           </a:p>
@@ -2179,7 +2184,7 @@
           <a:p>
             <a:fld id="{1E6A08FF-52C1-AC4B-874F-8C509BB53652}" type="datetimeFigureOut">
               <a:rPr lang="en-NL" smtClean="0"/>
-              <a:t>30/03/2025</a:t>
+              <a:t>25/04/2025</a:t>
             </a:fld>
             <a:endParaRPr lang="en-NL"/>
           </a:p>
@@ -2321,7 +2326,7 @@
           <a:p>
             <a:fld id="{1E6A08FF-52C1-AC4B-874F-8C509BB53652}" type="datetimeFigureOut">
               <a:rPr lang="en-NL" smtClean="0"/>
-              <a:t>30/03/2025</a:t>
+              <a:t>25/04/2025</a:t>
             </a:fld>
             <a:endParaRPr lang="en-NL"/>
           </a:p>
@@ -2434,7 +2439,7 @@
           <a:p>
             <a:fld id="{1E6A08FF-52C1-AC4B-874F-8C509BB53652}" type="datetimeFigureOut">
               <a:rPr lang="en-NL" smtClean="0"/>
-              <a:t>30/03/2025</a:t>
+              <a:t>25/04/2025</a:t>
             </a:fld>
             <a:endParaRPr lang="en-NL"/>
           </a:p>
@@ -2747,7 +2752,7 @@
           <a:p>
             <a:fld id="{1E6A08FF-52C1-AC4B-874F-8C509BB53652}" type="datetimeFigureOut">
               <a:rPr lang="en-NL" smtClean="0"/>
-              <a:t>30/03/2025</a:t>
+              <a:t>25/04/2025</a:t>
             </a:fld>
             <a:endParaRPr lang="en-NL"/>
           </a:p>
@@ -3036,7 +3041,7 @@
           <a:p>
             <a:fld id="{1E6A08FF-52C1-AC4B-874F-8C509BB53652}" type="datetimeFigureOut">
               <a:rPr lang="en-NL" smtClean="0"/>
-              <a:t>30/03/2025</a:t>
+              <a:t>25/04/2025</a:t>
             </a:fld>
             <a:endParaRPr lang="en-NL"/>
           </a:p>
@@ -3279,7 +3284,7 @@
           <a:p>
             <a:fld id="{1E6A08FF-52C1-AC4B-874F-8C509BB53652}" type="datetimeFigureOut">
               <a:rPr lang="en-NL" smtClean="0"/>
-              <a:t>30/03/2025</a:t>
+              <a:t>25/04/2025</a:t>
             </a:fld>
             <a:endParaRPr lang="en-NL"/>
           </a:p>

--- a/04_reports/Forecasting_Approach_01.pptx
+++ b/04_reports/Forecasting_Approach_01.pptx
@@ -198,7 +198,7 @@
           <a:p>
             <a:fld id="{2BF0393C-EE02-9F45-9A2B-7F4AFF6DAEEC}" type="datetimeFigureOut">
               <a:rPr lang="en-NL" smtClean="0"/>
-              <a:t>25/04/2025</a:t>
+              <a:t>08/05/2025</a:t>
             </a:fld>
             <a:endParaRPr lang="en-NL"/>
           </a:p>
@@ -615,7 +615,7 @@
           <a:p>
             <a:fld id="{1E6A08FF-52C1-AC4B-874F-8C509BB53652}" type="datetimeFigureOut">
               <a:rPr lang="en-NL" smtClean="0"/>
-              <a:t>25/04/2025</a:t>
+              <a:t>08/05/2025</a:t>
             </a:fld>
             <a:endParaRPr lang="en-NL"/>
           </a:p>
@@ -815,7 +815,7 @@
           <a:p>
             <a:fld id="{1E6A08FF-52C1-AC4B-874F-8C509BB53652}" type="datetimeFigureOut">
               <a:rPr lang="en-NL" smtClean="0"/>
-              <a:t>25/04/2025</a:t>
+              <a:t>08/05/2025</a:t>
             </a:fld>
             <a:endParaRPr lang="en-NL"/>
           </a:p>
@@ -1025,7 +1025,7 @@
           <a:p>
             <a:fld id="{1E6A08FF-52C1-AC4B-874F-8C509BB53652}" type="datetimeFigureOut">
               <a:rPr lang="en-NL" smtClean="0"/>
-              <a:t>25/04/2025</a:t>
+              <a:t>08/05/2025</a:t>
             </a:fld>
             <a:endParaRPr lang="en-NL"/>
           </a:p>
@@ -1225,7 +1225,7 @@
           <a:p>
             <a:fld id="{1E6A08FF-52C1-AC4B-874F-8C509BB53652}" type="datetimeFigureOut">
               <a:rPr lang="en-NL" smtClean="0"/>
-              <a:t>25/04/2025</a:t>
+              <a:t>08/05/2025</a:t>
             </a:fld>
             <a:endParaRPr lang="en-NL"/>
           </a:p>
@@ -1501,7 +1501,7 @@
           <a:p>
             <a:fld id="{1E6A08FF-52C1-AC4B-874F-8C509BB53652}" type="datetimeFigureOut">
               <a:rPr lang="en-NL" smtClean="0"/>
-              <a:t>25/04/2025</a:t>
+              <a:t>08/05/2025</a:t>
             </a:fld>
             <a:endParaRPr lang="en-NL"/>
           </a:p>
@@ -1769,7 +1769,7 @@
           <a:p>
             <a:fld id="{1E6A08FF-52C1-AC4B-874F-8C509BB53652}" type="datetimeFigureOut">
               <a:rPr lang="en-NL" smtClean="0"/>
-              <a:t>25/04/2025</a:t>
+              <a:t>08/05/2025</a:t>
             </a:fld>
             <a:endParaRPr lang="en-NL"/>
           </a:p>
@@ -2184,7 +2184,7 @@
           <a:p>
             <a:fld id="{1E6A08FF-52C1-AC4B-874F-8C509BB53652}" type="datetimeFigureOut">
               <a:rPr lang="en-NL" smtClean="0"/>
-              <a:t>25/04/2025</a:t>
+              <a:t>08/05/2025</a:t>
             </a:fld>
             <a:endParaRPr lang="en-NL"/>
           </a:p>
@@ -2326,7 +2326,7 @@
           <a:p>
             <a:fld id="{1E6A08FF-52C1-AC4B-874F-8C509BB53652}" type="datetimeFigureOut">
               <a:rPr lang="en-NL" smtClean="0"/>
-              <a:t>25/04/2025</a:t>
+              <a:t>08/05/2025</a:t>
             </a:fld>
             <a:endParaRPr lang="en-NL"/>
           </a:p>
@@ -2439,7 +2439,7 @@
           <a:p>
             <a:fld id="{1E6A08FF-52C1-AC4B-874F-8C509BB53652}" type="datetimeFigureOut">
               <a:rPr lang="en-NL" smtClean="0"/>
-              <a:t>25/04/2025</a:t>
+              <a:t>08/05/2025</a:t>
             </a:fld>
             <a:endParaRPr lang="en-NL"/>
           </a:p>
@@ -2752,7 +2752,7 @@
           <a:p>
             <a:fld id="{1E6A08FF-52C1-AC4B-874F-8C509BB53652}" type="datetimeFigureOut">
               <a:rPr lang="en-NL" smtClean="0"/>
-              <a:t>25/04/2025</a:t>
+              <a:t>08/05/2025</a:t>
             </a:fld>
             <a:endParaRPr lang="en-NL"/>
           </a:p>
@@ -3041,7 +3041,7 @@
           <a:p>
             <a:fld id="{1E6A08FF-52C1-AC4B-874F-8C509BB53652}" type="datetimeFigureOut">
               <a:rPr lang="en-NL" smtClean="0"/>
-              <a:t>25/04/2025</a:t>
+              <a:t>08/05/2025</a:t>
             </a:fld>
             <a:endParaRPr lang="en-NL"/>
           </a:p>
@@ -3284,7 +3284,7 @@
           <a:p>
             <a:fld id="{1E6A08FF-52C1-AC4B-874F-8C509BB53652}" type="datetimeFigureOut">
               <a:rPr lang="en-NL" smtClean="0"/>
-              <a:t>25/04/2025</a:t>
+              <a:t>08/05/2025</a:t>
             </a:fld>
             <a:endParaRPr lang="en-NL"/>
           </a:p>
